--- a/dist/초2/정보·AI/정보와표현/초2_정보·AI_정보와표현_01_순서를바꾸면_학생용.pptx
+++ b/dist/초2/정보·AI/정보와표현/초2_정보·AI_정보와표현_01_순서를바꾸면_학생용.pptx
@@ -118,44 +118,44 @@
   <p:extLst>
     <p:ext uri="{521415D9-36F7-43E2-AB2F-B90AF26B5E84}">
       <p14:sectionLst xmlns:p14="http://schemas.microsoft.com/office/powerpoint/2010/main">
-        <p14:section name="도입" id="{2f48db49-8c99-769d-ca05-b8810ea6dada}">
+        <p14:section name="도입" id="{8af30a2c-5aae-6364-ade8-9c1e1e1e280c}">
           <p14:sldIdLst>
             <p14:sldId id="256"/>
             <p14:sldId id="257"/>
           </p14:sldIdLst>
         </p14:section>
-        <p14:section name="개념" id="{41cd7023-6e1b-faa0-0a36-0c0f672040da}">
+        <p14:section name="개념" id="{16814158-1f0d-77a3-4deb-083bc44656a1}">
           <p14:sldIdLst>
             <p14:sldId id="258"/>
             <p14:sldId id="260"/>
             <p14:sldId id="261"/>
           </p14:sldIdLst>
         </p14:section>
-        <p14:section name="연습" id="{6af320eb-e5a3-0806-b64c-b0aacaa64dbe}">
+        <p14:section name="연습" id="{374bf348-cfb3-9a22-bfd9-425b0374b9a1}">
           <p14:sldIdLst>
             <p14:sldId id="259"/>
             <p14:sldId id="262"/>
             <p14:sldId id="263"/>
           </p14:sldIdLst>
         </p14:section>
-        <p14:section name="개념" id="{046d51fd-a9c1-3630-b7ab-010228c188ae}">
+        <p14:section name="개념" id="{e587014c-eacf-3ea8-a1c7-eb2050c36039}">
           <p14:sldIdLst/>
         </p14:section>
-        <p14:section name="연습" id="{30758f46-f8d7-86d9-7064-07298b7f7d36}">
+        <p14:section name="연습" id="{9c63b9bc-d637-3ac6-5a5e-081540ff8437}">
           <p14:sldIdLst/>
         </p14:section>
-        <p14:section name="확인" id="{9bf8d528-abc2-f6fe-8676-77e770b1314b}">
+        <p14:section name="확인" id="{c9206d8b-5b50-f173-7197-18014435534c}">
           <p14:sldIdLst>
             <p14:sldId id="264"/>
             <p14:sldId id="265"/>
           </p14:sldIdLst>
         </p14:section>
-        <p14:section name="정리" id="{a25a97b3-0b11-b065-8d3a-06f1ac73e57f}">
+        <p14:section name="정리" id="{932ddcb2-a4b3-14c3-f0f6-4638dfdb76a4}">
           <p14:sldIdLst>
             <p14:sldId id="266"/>
           </p14:sldIdLst>
         </p14:section>
-        <p14:section name="보충" id="{59f52923-cfbe-7961-3ebc-0bbf1c0bb6a3}">
+        <p14:section name="보충" id="{21dc45f5-1fbb-48b9-f498-50656fe004a3}">
           <p14:sldIdLst>
             <p14:sldId id="267"/>
           </p14:sldIdLst>
